--- a/docs/pptx/whole/ritu-linsubhr-ratio-throm3_10pct.pptx
+++ b/docs/pptx/whole/ritu-linsubhr-ratio-throm3_10pct.pptx
@@ -2443,7 +2443,7 @@
           </p:nvSpPr>
           <p:spPr>
             <a:xfrm>
-              <a:off x="955490" y="2073503"/>
+              <a:off x="957589" y="2073503"/>
               <a:ext cx="0" cy="3649639"/>
             </a:xfrm>
             <a:custGeom>
@@ -2486,7 +2486,7 @@
           </p:nvSpPr>
           <p:spPr>
             <a:xfrm>
-              <a:off x="1892768" y="2073503"/>
+              <a:off x="1893867" y="2073503"/>
               <a:ext cx="0" cy="3649639"/>
             </a:xfrm>
             <a:custGeom>
@@ -2529,7 +2529,7 @@
           </p:nvSpPr>
           <p:spPr>
             <a:xfrm>
-              <a:off x="2830046" y="2073503"/>
+              <a:off x="2830144" y="2073503"/>
               <a:ext cx="0" cy="3649639"/>
             </a:xfrm>
             <a:custGeom>
@@ -2572,7 +2572,7 @@
           </p:nvSpPr>
           <p:spPr>
             <a:xfrm>
-              <a:off x="3767323" y="2073503"/>
+              <a:off x="3766422" y="2073503"/>
               <a:ext cx="0" cy="3649639"/>
             </a:xfrm>
             <a:custGeom>
@@ -2615,7 +2615,7 @@
           </p:nvSpPr>
           <p:spPr>
             <a:xfrm>
-              <a:off x="4704601" y="2073503"/>
+              <a:off x="4702700" y="2073503"/>
               <a:ext cx="0" cy="3649639"/>
             </a:xfrm>
             <a:custGeom>
@@ -2658,7 +2658,7 @@
           </p:nvSpPr>
           <p:spPr>
             <a:xfrm>
-              <a:off x="5641878" y="2073503"/>
+              <a:off x="5638978" y="2073503"/>
               <a:ext cx="0" cy="3649639"/>
             </a:xfrm>
             <a:custGeom>
@@ -2701,7 +2701,7 @@
           </p:nvSpPr>
           <p:spPr>
             <a:xfrm>
-              <a:off x="6579156" y="2073503"/>
+              <a:off x="6575256" y="2073503"/>
               <a:ext cx="0" cy="3649639"/>
             </a:xfrm>
             <a:custGeom>
@@ -2744,7 +2744,7 @@
           </p:nvSpPr>
           <p:spPr>
             <a:xfrm>
-              <a:off x="7516433" y="2073503"/>
+              <a:off x="7511534" y="2073503"/>
               <a:ext cx="0" cy="3649639"/>
             </a:xfrm>
             <a:custGeom>
@@ -2787,7 +2787,7 @@
           </p:nvSpPr>
           <p:spPr>
             <a:xfrm>
-              <a:off x="8453711" y="2073503"/>
+              <a:off x="8447812" y="2073503"/>
               <a:ext cx="0" cy="3649639"/>
             </a:xfrm>
             <a:custGeom>
@@ -3045,7 +3045,7 @@
           </p:nvSpPr>
           <p:spPr>
             <a:xfrm>
-              <a:off x="1424129" y="2073503"/>
+              <a:off x="1425728" y="2073503"/>
               <a:ext cx="0" cy="3649639"/>
             </a:xfrm>
             <a:custGeom>
@@ -3088,7 +3088,7 @@
           </p:nvSpPr>
           <p:spPr>
             <a:xfrm>
-              <a:off x="2361407" y="2073503"/>
+              <a:off x="2362006" y="2073503"/>
               <a:ext cx="0" cy="3649639"/>
             </a:xfrm>
             <a:custGeom>
@@ -3131,7 +3131,7 @@
           </p:nvSpPr>
           <p:spPr>
             <a:xfrm>
-              <a:off x="3298684" y="2073503"/>
+              <a:off x="3298283" y="2073503"/>
               <a:ext cx="0" cy="3649639"/>
             </a:xfrm>
             <a:custGeom>
@@ -3174,7 +3174,7 @@
           </p:nvSpPr>
           <p:spPr>
             <a:xfrm>
-              <a:off x="4235962" y="2073503"/>
+              <a:off x="4234561" y="2073503"/>
               <a:ext cx="0" cy="3649639"/>
             </a:xfrm>
             <a:custGeom>
@@ -3217,7 +3217,7 @@
           </p:nvSpPr>
           <p:spPr>
             <a:xfrm>
-              <a:off x="5173239" y="2073503"/>
+              <a:off x="5170839" y="2073503"/>
               <a:ext cx="0" cy="3649639"/>
             </a:xfrm>
             <a:custGeom>
@@ -3260,7 +3260,7 @@
           </p:nvSpPr>
           <p:spPr>
             <a:xfrm>
-              <a:off x="6110517" y="2073503"/>
+              <a:off x="6107117" y="2073503"/>
               <a:ext cx="0" cy="3649639"/>
             </a:xfrm>
             <a:custGeom>
@@ -3303,7 +3303,7 @@
           </p:nvSpPr>
           <p:spPr>
             <a:xfrm>
-              <a:off x="7047795" y="2073503"/>
+              <a:off x="7043395" y="2073503"/>
               <a:ext cx="0" cy="3649639"/>
             </a:xfrm>
             <a:custGeom>
@@ -3346,7 +3346,7 @@
           </p:nvSpPr>
           <p:spPr>
             <a:xfrm>
-              <a:off x="7985072" y="2073503"/>
+              <a:off x="7979673" y="2073503"/>
               <a:ext cx="0" cy="3649639"/>
             </a:xfrm>
             <a:custGeom>
@@ -3397,49 +3397,49 @@
               <a:pathLst>
                 <a:path w="7090630" h="3483746">
                   <a:moveTo>
-                    <a:pt x="2916400" y="0"/>
+                    <a:pt x="2917681" y="0"/>
                   </a:moveTo>
                   <a:lnTo>
-                    <a:pt x="2936523" y="479104"/>
-                  </a:lnTo>
-                  <a:lnTo>
-                    <a:pt x="3008146" y="1566947"/>
-                  </a:lnTo>
-                  <a:lnTo>
-                    <a:pt x="3079768" y="2260932"/>
-                  </a:lnTo>
-                  <a:lnTo>
-                    <a:pt x="3151391" y="2636711"/>
-                  </a:lnTo>
-                  <a:lnTo>
-                    <a:pt x="3223013" y="2496142"/>
-                  </a:lnTo>
-                  <a:lnTo>
-                    <a:pt x="3294636" y="2332244"/>
-                  </a:lnTo>
-                  <a:lnTo>
-                    <a:pt x="3366258" y="2141146"/>
-                  </a:lnTo>
-                  <a:lnTo>
-                    <a:pt x="3437881" y="1918335"/>
-                  </a:lnTo>
-                  <a:lnTo>
-                    <a:pt x="3509503" y="1658547"/>
-                  </a:lnTo>
-                  <a:lnTo>
-                    <a:pt x="3581126" y="1355646"/>
-                  </a:lnTo>
-                  <a:lnTo>
-                    <a:pt x="3652748" y="1002477"/>
-                  </a:lnTo>
-                  <a:lnTo>
-                    <a:pt x="3724371" y="590698"/>
-                  </a:lnTo>
-                  <a:lnTo>
-                    <a:pt x="3795993" y="110582"/>
-                  </a:lnTo>
-                  <a:lnTo>
-                    <a:pt x="3810142" y="0"/>
+                    <a:pt x="2936523" y="455001"/>
+                  </a:lnTo>
+                  <a:lnTo>
+                    <a:pt x="3008146" y="1555881"/>
+                  </a:lnTo>
+                  <a:lnTo>
+                    <a:pt x="3079768" y="2256616"/>
+                  </a:lnTo>
+                  <a:lnTo>
+                    <a:pt x="3151391" y="2637433"/>
+                  </a:lnTo>
+                  <a:lnTo>
+                    <a:pt x="3223013" y="2499282"/>
+                  </a:lnTo>
+                  <a:lnTo>
+                    <a:pt x="3294636" y="2338579"/>
+                  </a:lnTo>
+                  <a:lnTo>
+                    <a:pt x="3366258" y="2151643"/>
+                  </a:lnTo>
+                  <a:lnTo>
+                    <a:pt x="3437881" y="1934192"/>
+                  </a:lnTo>
+                  <a:lnTo>
+                    <a:pt x="3509503" y="1681245"/>
+                  </a:lnTo>
+                  <a:lnTo>
+                    <a:pt x="3581126" y="1387007"/>
+                  </a:lnTo>
+                  <a:lnTo>
+                    <a:pt x="3652748" y="1044738"/>
+                  </a:lnTo>
+                  <a:lnTo>
+                    <a:pt x="3724371" y="646597"/>
+                  </a:lnTo>
+                  <a:lnTo>
+                    <a:pt x="3795993" y="183464"/>
+                  </a:lnTo>
+                  <a:lnTo>
+                    <a:pt x="3820384" y="0"/>
                   </a:lnTo>
                   <a:lnTo>
                     <a:pt x="7090630" y="0"/>
@@ -3535,214 +3535,214 @@
                     <a:pt x="5013576" y="3483740"/>
                   </a:lnTo>
                   <a:lnTo>
-                    <a:pt x="4941954" y="3483736"/>
-                  </a:lnTo>
-                  <a:lnTo>
-                    <a:pt x="4870331" y="3483730"/>
-                  </a:lnTo>
-                  <a:lnTo>
-                    <a:pt x="4798709" y="3483721"/>
-                  </a:lnTo>
-                  <a:lnTo>
-                    <a:pt x="4727086" y="3483707"/>
-                  </a:lnTo>
-                  <a:lnTo>
-                    <a:pt x="4655464" y="3483684"/>
-                  </a:lnTo>
-                  <a:lnTo>
-                    <a:pt x="4583841" y="3483649"/>
-                  </a:lnTo>
-                  <a:lnTo>
-                    <a:pt x="4512219" y="3483594"/>
-                  </a:lnTo>
-                  <a:lnTo>
-                    <a:pt x="4440596" y="3483507"/>
-                  </a:lnTo>
-                  <a:lnTo>
-                    <a:pt x="4368974" y="3483372"/>
-                  </a:lnTo>
-                  <a:lnTo>
-                    <a:pt x="4297351" y="3483159"/>
-                  </a:lnTo>
-                  <a:lnTo>
-                    <a:pt x="4225729" y="3482826"/>
-                  </a:lnTo>
-                  <a:lnTo>
-                    <a:pt x="4154106" y="3482304"/>
-                  </a:lnTo>
-                  <a:lnTo>
-                    <a:pt x="4082483" y="3481485"/>
-                  </a:lnTo>
-                  <a:lnTo>
-                    <a:pt x="4010861" y="3480202"/>
-                  </a:lnTo>
-                  <a:lnTo>
-                    <a:pt x="3939238" y="3478190"/>
-                  </a:lnTo>
-                  <a:lnTo>
-                    <a:pt x="3867616" y="3475037"/>
-                  </a:lnTo>
-                  <a:lnTo>
-                    <a:pt x="3795993" y="3470094"/>
-                  </a:lnTo>
-                  <a:lnTo>
-                    <a:pt x="3724371" y="3462346"/>
-                  </a:lnTo>
-                  <a:lnTo>
-                    <a:pt x="3652748" y="3450201"/>
-                  </a:lnTo>
-                  <a:lnTo>
-                    <a:pt x="3581126" y="3431163"/>
-                  </a:lnTo>
-                  <a:lnTo>
-                    <a:pt x="3509503" y="3401320"/>
-                  </a:lnTo>
-                  <a:lnTo>
-                    <a:pt x="3437881" y="3354541"/>
-                  </a:lnTo>
-                  <a:lnTo>
-                    <a:pt x="3366258" y="3281213"/>
-                  </a:lnTo>
-                  <a:lnTo>
-                    <a:pt x="3294636" y="3166269"/>
-                  </a:lnTo>
-                  <a:lnTo>
-                    <a:pt x="3223013" y="2986092"/>
-                  </a:lnTo>
-                  <a:lnTo>
-                    <a:pt x="3151391" y="2703657"/>
-                  </a:lnTo>
-                  <a:lnTo>
-                    <a:pt x="3079768" y="2757273"/>
-                  </a:lnTo>
-                  <a:lnTo>
-                    <a:pt x="3008146" y="2860675"/>
-                  </a:lnTo>
-                  <a:lnTo>
-                    <a:pt x="2936523" y="2949359"/>
-                  </a:lnTo>
-                  <a:lnTo>
-                    <a:pt x="2864901" y="3025421"/>
-                  </a:lnTo>
-                  <a:lnTo>
-                    <a:pt x="2793278" y="3090656"/>
-                  </a:lnTo>
-                  <a:lnTo>
-                    <a:pt x="2721655" y="3146606"/>
-                  </a:lnTo>
-                  <a:lnTo>
-                    <a:pt x="2650033" y="3194593"/>
-                  </a:lnTo>
-                  <a:lnTo>
-                    <a:pt x="2578410" y="3235749"/>
-                  </a:lnTo>
-                  <a:lnTo>
-                    <a:pt x="2506788" y="3271047"/>
-                  </a:lnTo>
-                  <a:lnTo>
-                    <a:pt x="2435165" y="3301322"/>
-                  </a:lnTo>
-                  <a:lnTo>
-                    <a:pt x="2363543" y="3327287"/>
-                  </a:lnTo>
-                  <a:lnTo>
-                    <a:pt x="2291920" y="3349556"/>
-                  </a:lnTo>
-                  <a:lnTo>
-                    <a:pt x="2220298" y="3368656"/>
-                  </a:lnTo>
-                  <a:lnTo>
-                    <a:pt x="2148675" y="3385038"/>
-                  </a:lnTo>
-                  <a:lnTo>
-                    <a:pt x="2077053" y="3399087"/>
-                  </a:lnTo>
-                  <a:lnTo>
-                    <a:pt x="2005430" y="3411137"/>
-                  </a:lnTo>
-                  <a:lnTo>
-                    <a:pt x="1933808" y="3421472"/>
-                  </a:lnTo>
-                  <a:lnTo>
-                    <a:pt x="1862185" y="3430336"/>
-                  </a:lnTo>
-                  <a:lnTo>
-                    <a:pt x="1790563" y="3437938"/>
-                  </a:lnTo>
-                  <a:lnTo>
-                    <a:pt x="1718940" y="3444458"/>
-                  </a:lnTo>
-                  <a:lnTo>
-                    <a:pt x="1647318" y="3450050"/>
-                  </a:lnTo>
-                  <a:lnTo>
-                    <a:pt x="1575695" y="3454846"/>
-                  </a:lnTo>
-                  <a:lnTo>
-                    <a:pt x="1504073" y="3458960"/>
-                  </a:lnTo>
-                  <a:lnTo>
-                    <a:pt x="1432450" y="3462488"/>
-                  </a:lnTo>
-                  <a:lnTo>
-                    <a:pt x="1360827" y="3465513"/>
-                  </a:lnTo>
-                  <a:lnTo>
-                    <a:pt x="1289205" y="3468109"/>
-                  </a:lnTo>
-                  <a:lnTo>
-                    <a:pt x="1217582" y="3470334"/>
-                  </a:lnTo>
-                  <a:lnTo>
-                    <a:pt x="1145960" y="3472243"/>
-                  </a:lnTo>
-                  <a:lnTo>
-                    <a:pt x="1074337" y="3473881"/>
-                  </a:lnTo>
-                  <a:lnTo>
-                    <a:pt x="1002715" y="3475285"/>
-                  </a:lnTo>
-                  <a:lnTo>
-                    <a:pt x="931092" y="3476489"/>
-                  </a:lnTo>
-                  <a:lnTo>
-                    <a:pt x="859470" y="3477522"/>
-                  </a:lnTo>
-                  <a:lnTo>
-                    <a:pt x="787847" y="3478408"/>
-                  </a:lnTo>
-                  <a:lnTo>
-                    <a:pt x="716225" y="3479168"/>
-                  </a:lnTo>
-                  <a:lnTo>
-                    <a:pt x="644602" y="3479820"/>
-                  </a:lnTo>
-                  <a:lnTo>
-                    <a:pt x="572980" y="3480379"/>
-                  </a:lnTo>
-                  <a:lnTo>
-                    <a:pt x="501357" y="3480858"/>
-                  </a:lnTo>
-                  <a:lnTo>
-                    <a:pt x="429735" y="3481269"/>
-                  </a:lnTo>
-                  <a:lnTo>
-                    <a:pt x="358112" y="3481622"/>
-                  </a:lnTo>
-                  <a:lnTo>
-                    <a:pt x="286490" y="3481924"/>
-                  </a:lnTo>
-                  <a:lnTo>
-                    <a:pt x="214867" y="3482183"/>
-                  </a:lnTo>
-                  <a:lnTo>
-                    <a:pt x="143245" y="3482406"/>
-                  </a:lnTo>
-                  <a:lnTo>
-                    <a:pt x="71622" y="3482597"/>
-                  </a:lnTo>
-                  <a:lnTo>
-                    <a:pt x="0" y="3482760"/>
+                    <a:pt x="4941954" y="3483737"/>
+                  </a:lnTo>
+                  <a:lnTo>
+                    <a:pt x="4870331" y="3483731"/>
+                  </a:lnTo>
+                  <a:lnTo>
+                    <a:pt x="4798709" y="3483722"/>
+                  </a:lnTo>
+                  <a:lnTo>
+                    <a:pt x="4727086" y="3483709"/>
+                  </a:lnTo>
+                  <a:lnTo>
+                    <a:pt x="4655464" y="3483687"/>
+                  </a:lnTo>
+                  <a:lnTo>
+                    <a:pt x="4583841" y="3483653"/>
+                  </a:lnTo>
+                  <a:lnTo>
+                    <a:pt x="4512219" y="3483600"/>
+                  </a:lnTo>
+                  <a:lnTo>
+                    <a:pt x="4440596" y="3483517"/>
+                  </a:lnTo>
+                  <a:lnTo>
+                    <a:pt x="4368974" y="3483385"/>
+                  </a:lnTo>
+                  <a:lnTo>
+                    <a:pt x="4297351" y="3483179"/>
+                  </a:lnTo>
+                  <a:lnTo>
+                    <a:pt x="4225729" y="3482855"/>
+                  </a:lnTo>
+                  <a:lnTo>
+                    <a:pt x="4154106" y="3482346"/>
+                  </a:lnTo>
+                  <a:lnTo>
+                    <a:pt x="4082483" y="3481547"/>
+                  </a:lnTo>
+                  <a:lnTo>
+                    <a:pt x="4010861" y="3480291"/>
+                  </a:lnTo>
+                  <a:lnTo>
+                    <a:pt x="3939238" y="3478318"/>
+                  </a:lnTo>
+                  <a:lnTo>
+                    <a:pt x="3867616" y="3475218"/>
+                  </a:lnTo>
+                  <a:lnTo>
+                    <a:pt x="3795993" y="3470349"/>
+                  </a:lnTo>
+                  <a:lnTo>
+                    <a:pt x="3724371" y="3462698"/>
+                  </a:lnTo>
+                  <a:lnTo>
+                    <a:pt x="3652748" y="3450679"/>
+                  </a:lnTo>
+                  <a:lnTo>
+                    <a:pt x="3581126" y="3431796"/>
+                  </a:lnTo>
+                  <a:lnTo>
+                    <a:pt x="3509503" y="3402130"/>
+                  </a:lnTo>
+                  <a:lnTo>
+                    <a:pt x="3437881" y="3355525"/>
+                  </a:lnTo>
+                  <a:lnTo>
+                    <a:pt x="3366258" y="3282306"/>
+                  </a:lnTo>
+                  <a:lnTo>
+                    <a:pt x="3294636" y="3167276"/>
+                  </a:lnTo>
+                  <a:lnTo>
+                    <a:pt x="3223013" y="2986561"/>
+                  </a:lnTo>
+                  <a:lnTo>
+                    <a:pt x="3151391" y="2702650"/>
+                  </a:lnTo>
+                  <a:lnTo>
+                    <a:pt x="3079768" y="2756197"/>
+                  </a:lnTo>
+                  <a:lnTo>
+                    <a:pt x="3008146" y="2858295"/>
+                  </a:lnTo>
+                  <a:lnTo>
+                    <a:pt x="2936523" y="2946066"/>
+                  </a:lnTo>
+                  <a:lnTo>
+                    <a:pt x="2864901" y="3021519"/>
+                  </a:lnTo>
+                  <a:lnTo>
+                    <a:pt x="2793278" y="3086384"/>
+                  </a:lnTo>
+                  <a:lnTo>
+                    <a:pt x="2721655" y="3142146"/>
+                  </a:lnTo>
+                  <a:lnTo>
+                    <a:pt x="2650033" y="3190084"/>
+                  </a:lnTo>
+                  <a:lnTo>
+                    <a:pt x="2578410" y="3231294"/>
+                  </a:lnTo>
+                  <a:lnTo>
+                    <a:pt x="2506788" y="3266721"/>
+                  </a:lnTo>
+                  <a:lnTo>
+                    <a:pt x="2435165" y="3297176"/>
+                  </a:lnTo>
+                  <a:lnTo>
+                    <a:pt x="2363543" y="3323358"/>
+                  </a:lnTo>
+                  <a:lnTo>
+                    <a:pt x="2291920" y="3345865"/>
+                  </a:lnTo>
+                  <a:lnTo>
+                    <a:pt x="2220298" y="3365214"/>
+                  </a:lnTo>
+                  <a:lnTo>
+                    <a:pt x="2148675" y="3381848"/>
+                  </a:lnTo>
+                  <a:lnTo>
+                    <a:pt x="2077053" y="3396148"/>
+                  </a:lnTo>
+                  <a:lnTo>
+                    <a:pt x="2005430" y="3408440"/>
+                  </a:lnTo>
+                  <a:lnTo>
+                    <a:pt x="1933808" y="3419008"/>
+                  </a:lnTo>
+                  <a:lnTo>
+                    <a:pt x="1862185" y="3428093"/>
+                  </a:lnTo>
+                  <a:lnTo>
+                    <a:pt x="1790563" y="3435903"/>
+                  </a:lnTo>
+                  <a:lnTo>
+                    <a:pt x="1718940" y="3442617"/>
+                  </a:lnTo>
+                  <a:lnTo>
+                    <a:pt x="1647318" y="3448389"/>
+                  </a:lnTo>
+                  <a:lnTo>
+                    <a:pt x="1575695" y="3453350"/>
+                  </a:lnTo>
+                  <a:lnTo>
+                    <a:pt x="1504073" y="3457616"/>
+                  </a:lnTo>
+                  <a:lnTo>
+                    <a:pt x="1432450" y="3461283"/>
+                  </a:lnTo>
+                  <a:lnTo>
+                    <a:pt x="1360827" y="3464435"/>
+                  </a:lnTo>
+                  <a:lnTo>
+                    <a:pt x="1289205" y="3467145"/>
+                  </a:lnTo>
+                  <a:lnTo>
+                    <a:pt x="1217582" y="3469475"/>
+                  </a:lnTo>
+                  <a:lnTo>
+                    <a:pt x="1145960" y="3471478"/>
+                  </a:lnTo>
+                  <a:lnTo>
+                    <a:pt x="1074337" y="3473199"/>
+                  </a:lnTo>
+                  <a:lnTo>
+                    <a:pt x="1002715" y="3474679"/>
+                  </a:lnTo>
+                  <a:lnTo>
+                    <a:pt x="931092" y="3475952"/>
+                  </a:lnTo>
+                  <a:lnTo>
+                    <a:pt x="859470" y="3477046"/>
+                  </a:lnTo>
+                  <a:lnTo>
+                    <a:pt x="787847" y="3477986"/>
+                  </a:lnTo>
+                  <a:lnTo>
+                    <a:pt x="716225" y="3478794"/>
+                  </a:lnTo>
+                  <a:lnTo>
+                    <a:pt x="644602" y="3479489"/>
+                  </a:lnTo>
+                  <a:lnTo>
+                    <a:pt x="572980" y="3480087"/>
+                  </a:lnTo>
+                  <a:lnTo>
+                    <a:pt x="501357" y="3480600"/>
+                  </a:lnTo>
+                  <a:lnTo>
+                    <a:pt x="429735" y="3481042"/>
+                  </a:lnTo>
+                  <a:lnTo>
+                    <a:pt x="358112" y="3481421"/>
+                  </a:lnTo>
+                  <a:lnTo>
+                    <a:pt x="286490" y="3481748"/>
+                  </a:lnTo>
+                  <a:lnTo>
+                    <a:pt x="214867" y="3482028"/>
+                  </a:lnTo>
+                  <a:lnTo>
+                    <a:pt x="143245" y="3482269"/>
+                  </a:lnTo>
+                  <a:lnTo>
+                    <a:pt x="71622" y="3482477"/>
+                  </a:lnTo>
+                  <a:lnTo>
+                    <a:pt x="0" y="3482655"/>
                   </a:lnTo>
                   <a:lnTo>
                     <a:pt x="0" y="0"/>
@@ -3771,57 +3771,57 @@
           </p:nvSpPr>
           <p:spPr>
             <a:xfrm>
-              <a:off x="4088449" y="2073503"/>
-              <a:ext cx="893741" cy="2636711"/>
+              <a:off x="4089730" y="2073503"/>
+              <a:ext cx="902703" cy="2637433"/>
             </a:xfrm>
             <a:custGeom>
               <a:avLst/>
               <a:pathLst>
-                <a:path w="893741" h="2636711">
+                <a:path w="902703" h="2637433">
                   <a:moveTo>
                     <a:pt x="0" y="0"/>
                   </a:moveTo>
                   <a:lnTo>
-                    <a:pt x="20123" y="479104"/>
-                  </a:lnTo>
-                  <a:lnTo>
-                    <a:pt x="91745" y="1566947"/>
-                  </a:lnTo>
-                  <a:lnTo>
-                    <a:pt x="163368" y="2260932"/>
-                  </a:lnTo>
-                  <a:lnTo>
-                    <a:pt x="234990" y="2636711"/>
-                  </a:lnTo>
-                  <a:lnTo>
-                    <a:pt x="306613" y="2496142"/>
-                  </a:lnTo>
-                  <a:lnTo>
-                    <a:pt x="378235" y="2332244"/>
-                  </a:lnTo>
-                  <a:lnTo>
-                    <a:pt x="449858" y="2141146"/>
-                  </a:lnTo>
-                  <a:lnTo>
-                    <a:pt x="521480" y="1918335"/>
-                  </a:lnTo>
-                  <a:lnTo>
-                    <a:pt x="593103" y="1658547"/>
-                  </a:lnTo>
-                  <a:lnTo>
-                    <a:pt x="664725" y="1355646"/>
-                  </a:lnTo>
-                  <a:lnTo>
-                    <a:pt x="736348" y="1002477"/>
-                  </a:lnTo>
-                  <a:lnTo>
-                    <a:pt x="807971" y="590698"/>
-                  </a:lnTo>
-                  <a:lnTo>
-                    <a:pt x="879593" y="110582"/>
-                  </a:lnTo>
-                  <a:lnTo>
-                    <a:pt x="893741" y="0"/>
+                    <a:pt x="18842" y="455001"/>
+                  </a:lnTo>
+                  <a:lnTo>
+                    <a:pt x="90464" y="1555881"/>
+                  </a:lnTo>
+                  <a:lnTo>
+                    <a:pt x="162087" y="2256616"/>
+                  </a:lnTo>
+                  <a:lnTo>
+                    <a:pt x="233710" y="2637433"/>
+                  </a:lnTo>
+                  <a:lnTo>
+                    <a:pt x="305332" y="2499282"/>
+                  </a:lnTo>
+                  <a:lnTo>
+                    <a:pt x="376955" y="2338579"/>
+                  </a:lnTo>
+                  <a:lnTo>
+                    <a:pt x="448577" y="2151643"/>
+                  </a:lnTo>
+                  <a:lnTo>
+                    <a:pt x="520200" y="1934192"/>
+                  </a:lnTo>
+                  <a:lnTo>
+                    <a:pt x="591822" y="1681245"/>
+                  </a:lnTo>
+                  <a:lnTo>
+                    <a:pt x="663445" y="1387007"/>
+                  </a:lnTo>
+                  <a:lnTo>
+                    <a:pt x="735067" y="1044738"/>
+                  </a:lnTo>
+                  <a:lnTo>
+                    <a:pt x="806690" y="646597"/>
+                  </a:lnTo>
+                  <a:lnTo>
+                    <a:pt x="878312" y="183464"/>
+                  </a:lnTo>
+                  <a:lnTo>
+                    <a:pt x="902703" y="0"/>
                   </a:lnTo>
                 </a:path>
               </a:pathLst>
@@ -3841,312 +3841,312 @@
           </p:nvSpPr>
           <p:spPr>
             <a:xfrm>
-              <a:off x="1172049" y="4777160"/>
-              <a:ext cx="7090630" cy="780089"/>
+              <a:off x="1172049" y="4776153"/>
+              <a:ext cx="7090630" cy="781096"/>
             </a:xfrm>
             <a:custGeom>
               <a:avLst/>
               <a:pathLst>
-                <a:path w="7090630" h="780089">
+                <a:path w="7090630" h="781096">
                   <a:moveTo>
-                    <a:pt x="7090630" y="780089"/>
+                    <a:pt x="7090630" y="781096"/>
                   </a:moveTo>
                   <a:lnTo>
-                    <a:pt x="7019007" y="780089"/>
-                  </a:lnTo>
-                  <a:lnTo>
-                    <a:pt x="6947385" y="780089"/>
-                  </a:lnTo>
-                  <a:lnTo>
-                    <a:pt x="6875762" y="780089"/>
-                  </a:lnTo>
-                  <a:lnTo>
-                    <a:pt x="6804139" y="780089"/>
-                  </a:lnTo>
-                  <a:lnTo>
-                    <a:pt x="6732517" y="780089"/>
-                  </a:lnTo>
-                  <a:lnTo>
-                    <a:pt x="6660894" y="780089"/>
-                  </a:lnTo>
-                  <a:lnTo>
-                    <a:pt x="6589272" y="780089"/>
-                  </a:lnTo>
-                  <a:lnTo>
-                    <a:pt x="6517649" y="780089"/>
-                  </a:lnTo>
-                  <a:lnTo>
-                    <a:pt x="6446027" y="780089"/>
-                  </a:lnTo>
-                  <a:lnTo>
-                    <a:pt x="6374404" y="780089"/>
-                  </a:lnTo>
-                  <a:lnTo>
-                    <a:pt x="6302782" y="780089"/>
-                  </a:lnTo>
-                  <a:lnTo>
-                    <a:pt x="6231159" y="780089"/>
-                  </a:lnTo>
-                  <a:lnTo>
-                    <a:pt x="6159537" y="780089"/>
-                  </a:lnTo>
-                  <a:lnTo>
-                    <a:pt x="6087914" y="780089"/>
-                  </a:lnTo>
-                  <a:lnTo>
-                    <a:pt x="6016292" y="780089"/>
-                  </a:lnTo>
-                  <a:lnTo>
-                    <a:pt x="5944669" y="780089"/>
-                  </a:lnTo>
-                  <a:lnTo>
-                    <a:pt x="5873047" y="780089"/>
-                  </a:lnTo>
-                  <a:lnTo>
-                    <a:pt x="5801424" y="780089"/>
-                  </a:lnTo>
-                  <a:lnTo>
-                    <a:pt x="5729802" y="780089"/>
-                  </a:lnTo>
-                  <a:lnTo>
-                    <a:pt x="5658179" y="780089"/>
-                  </a:lnTo>
-                  <a:lnTo>
-                    <a:pt x="5586557" y="780089"/>
-                  </a:lnTo>
-                  <a:lnTo>
-                    <a:pt x="5514934" y="780089"/>
-                  </a:lnTo>
-                  <a:lnTo>
-                    <a:pt x="5443311" y="780089"/>
-                  </a:lnTo>
-                  <a:lnTo>
-                    <a:pt x="5371689" y="780088"/>
-                  </a:lnTo>
-                  <a:lnTo>
-                    <a:pt x="5300066" y="780088"/>
-                  </a:lnTo>
-                  <a:lnTo>
-                    <a:pt x="5228444" y="780087"/>
-                  </a:lnTo>
-                  <a:lnTo>
-                    <a:pt x="5156821" y="780086"/>
-                  </a:lnTo>
-                  <a:lnTo>
-                    <a:pt x="5085199" y="780085"/>
-                  </a:lnTo>
-                  <a:lnTo>
-                    <a:pt x="5013576" y="780082"/>
-                  </a:lnTo>
-                  <a:lnTo>
-                    <a:pt x="4941954" y="780079"/>
-                  </a:lnTo>
-                  <a:lnTo>
-                    <a:pt x="4870331" y="780073"/>
-                  </a:lnTo>
-                  <a:lnTo>
-                    <a:pt x="4798709" y="780064"/>
-                  </a:lnTo>
-                  <a:lnTo>
-                    <a:pt x="4727086" y="780049"/>
-                  </a:lnTo>
-                  <a:lnTo>
-                    <a:pt x="4655464" y="780027"/>
-                  </a:lnTo>
-                  <a:lnTo>
-                    <a:pt x="4583841" y="779992"/>
-                  </a:lnTo>
-                  <a:lnTo>
-                    <a:pt x="4512219" y="779937"/>
-                  </a:lnTo>
-                  <a:lnTo>
-                    <a:pt x="4440596" y="779850"/>
-                  </a:lnTo>
-                  <a:lnTo>
-                    <a:pt x="4368974" y="779714"/>
-                  </a:lnTo>
-                  <a:lnTo>
-                    <a:pt x="4297351" y="779502"/>
-                  </a:lnTo>
-                  <a:lnTo>
-                    <a:pt x="4225729" y="779169"/>
-                  </a:lnTo>
-                  <a:lnTo>
-                    <a:pt x="4154106" y="778646"/>
-                  </a:lnTo>
-                  <a:lnTo>
-                    <a:pt x="4082483" y="777828"/>
-                  </a:lnTo>
-                  <a:lnTo>
-                    <a:pt x="4010861" y="776545"/>
-                  </a:lnTo>
-                  <a:lnTo>
-                    <a:pt x="3939238" y="774533"/>
-                  </a:lnTo>
-                  <a:lnTo>
-                    <a:pt x="3867616" y="771380"/>
-                  </a:lnTo>
-                  <a:lnTo>
-                    <a:pt x="3795993" y="766437"/>
-                  </a:lnTo>
-                  <a:lnTo>
-                    <a:pt x="3724371" y="758689"/>
-                  </a:lnTo>
-                  <a:lnTo>
-                    <a:pt x="3652748" y="746544"/>
-                  </a:lnTo>
-                  <a:lnTo>
-                    <a:pt x="3581126" y="727506"/>
-                  </a:lnTo>
-                  <a:lnTo>
-                    <a:pt x="3509503" y="697663"/>
-                  </a:lnTo>
-                  <a:lnTo>
-                    <a:pt x="3437881" y="650884"/>
-                  </a:lnTo>
-                  <a:lnTo>
-                    <a:pt x="3366258" y="577556"/>
-                  </a:lnTo>
-                  <a:lnTo>
-                    <a:pt x="3294636" y="462612"/>
-                  </a:lnTo>
-                  <a:lnTo>
-                    <a:pt x="3223013" y="282434"/>
+                    <a:pt x="7019007" y="781096"/>
+                  </a:lnTo>
+                  <a:lnTo>
+                    <a:pt x="6947385" y="781096"/>
+                  </a:lnTo>
+                  <a:lnTo>
+                    <a:pt x="6875762" y="781096"/>
+                  </a:lnTo>
+                  <a:lnTo>
+                    <a:pt x="6804139" y="781096"/>
+                  </a:lnTo>
+                  <a:lnTo>
+                    <a:pt x="6732517" y="781096"/>
+                  </a:lnTo>
+                  <a:lnTo>
+                    <a:pt x="6660894" y="781096"/>
+                  </a:lnTo>
+                  <a:lnTo>
+                    <a:pt x="6589272" y="781096"/>
+                  </a:lnTo>
+                  <a:lnTo>
+                    <a:pt x="6517649" y="781096"/>
+                  </a:lnTo>
+                  <a:lnTo>
+                    <a:pt x="6446027" y="781096"/>
+                  </a:lnTo>
+                  <a:lnTo>
+                    <a:pt x="6374404" y="781096"/>
+                  </a:lnTo>
+                  <a:lnTo>
+                    <a:pt x="6302782" y="781096"/>
+                  </a:lnTo>
+                  <a:lnTo>
+                    <a:pt x="6231159" y="781096"/>
+                  </a:lnTo>
+                  <a:lnTo>
+                    <a:pt x="6159537" y="781096"/>
+                  </a:lnTo>
+                  <a:lnTo>
+                    <a:pt x="6087914" y="781096"/>
+                  </a:lnTo>
+                  <a:lnTo>
+                    <a:pt x="6016292" y="781096"/>
+                  </a:lnTo>
+                  <a:lnTo>
+                    <a:pt x="5944669" y="781096"/>
+                  </a:lnTo>
+                  <a:lnTo>
+                    <a:pt x="5873047" y="781096"/>
+                  </a:lnTo>
+                  <a:lnTo>
+                    <a:pt x="5801424" y="781096"/>
+                  </a:lnTo>
+                  <a:lnTo>
+                    <a:pt x="5729802" y="781096"/>
+                  </a:lnTo>
+                  <a:lnTo>
+                    <a:pt x="5658179" y="781096"/>
+                  </a:lnTo>
+                  <a:lnTo>
+                    <a:pt x="5586557" y="781096"/>
+                  </a:lnTo>
+                  <a:lnTo>
+                    <a:pt x="5514934" y="781096"/>
+                  </a:lnTo>
+                  <a:lnTo>
+                    <a:pt x="5443311" y="781096"/>
+                  </a:lnTo>
+                  <a:lnTo>
+                    <a:pt x="5371689" y="781095"/>
+                  </a:lnTo>
+                  <a:lnTo>
+                    <a:pt x="5300066" y="781095"/>
+                  </a:lnTo>
+                  <a:lnTo>
+                    <a:pt x="5228444" y="781095"/>
+                  </a:lnTo>
+                  <a:lnTo>
+                    <a:pt x="5156821" y="781094"/>
+                  </a:lnTo>
+                  <a:lnTo>
+                    <a:pt x="5085199" y="781092"/>
+                  </a:lnTo>
+                  <a:lnTo>
+                    <a:pt x="5013576" y="781090"/>
+                  </a:lnTo>
+                  <a:lnTo>
+                    <a:pt x="4941954" y="781086"/>
+                  </a:lnTo>
+                  <a:lnTo>
+                    <a:pt x="4870331" y="781081"/>
+                  </a:lnTo>
+                  <a:lnTo>
+                    <a:pt x="4798709" y="781072"/>
+                  </a:lnTo>
+                  <a:lnTo>
+                    <a:pt x="4727086" y="781058"/>
+                  </a:lnTo>
+                  <a:lnTo>
+                    <a:pt x="4655464" y="781037"/>
+                  </a:lnTo>
+                  <a:lnTo>
+                    <a:pt x="4583841" y="781003"/>
+                  </a:lnTo>
+                  <a:lnTo>
+                    <a:pt x="4512219" y="780950"/>
+                  </a:lnTo>
+                  <a:lnTo>
+                    <a:pt x="4440596" y="780866"/>
+                  </a:lnTo>
+                  <a:lnTo>
+                    <a:pt x="4368974" y="780735"/>
+                  </a:lnTo>
+                  <a:lnTo>
+                    <a:pt x="4297351" y="780529"/>
+                  </a:lnTo>
+                  <a:lnTo>
+                    <a:pt x="4225729" y="780205"/>
+                  </a:lnTo>
+                  <a:lnTo>
+                    <a:pt x="4154106" y="779696"/>
+                  </a:lnTo>
+                  <a:lnTo>
+                    <a:pt x="4082483" y="778897"/>
+                  </a:lnTo>
+                  <a:lnTo>
+                    <a:pt x="4010861" y="777641"/>
+                  </a:lnTo>
+                  <a:lnTo>
+                    <a:pt x="3939238" y="775668"/>
+                  </a:lnTo>
+                  <a:lnTo>
+                    <a:pt x="3867616" y="772568"/>
+                  </a:lnTo>
+                  <a:lnTo>
+                    <a:pt x="3795993" y="767698"/>
+                  </a:lnTo>
+                  <a:lnTo>
+                    <a:pt x="3724371" y="760048"/>
+                  </a:lnTo>
+                  <a:lnTo>
+                    <a:pt x="3652748" y="748029"/>
+                  </a:lnTo>
+                  <a:lnTo>
+                    <a:pt x="3581126" y="729146"/>
+                  </a:lnTo>
+                  <a:lnTo>
+                    <a:pt x="3509503" y="699480"/>
+                  </a:lnTo>
+                  <a:lnTo>
+                    <a:pt x="3437881" y="652875"/>
+                  </a:lnTo>
+                  <a:lnTo>
+                    <a:pt x="3366258" y="579656"/>
+                  </a:lnTo>
+                  <a:lnTo>
+                    <a:pt x="3294636" y="464626"/>
+                  </a:lnTo>
+                  <a:lnTo>
+                    <a:pt x="3223013" y="283910"/>
                   </a:lnTo>
                   <a:lnTo>
                     <a:pt x="3151391" y="0"/>
                   </a:lnTo>
                   <a:lnTo>
-                    <a:pt x="3079768" y="53616"/>
-                  </a:lnTo>
-                  <a:lnTo>
-                    <a:pt x="3008146" y="157018"/>
-                  </a:lnTo>
-                  <a:lnTo>
-                    <a:pt x="2936523" y="245702"/>
-                  </a:lnTo>
-                  <a:lnTo>
-                    <a:pt x="2864901" y="321763"/>
-                  </a:lnTo>
-                  <a:lnTo>
-                    <a:pt x="2793278" y="386999"/>
-                  </a:lnTo>
-                  <a:lnTo>
-                    <a:pt x="2721655" y="442949"/>
-                  </a:lnTo>
-                  <a:lnTo>
-                    <a:pt x="2650033" y="490935"/>
-                  </a:lnTo>
-                  <a:lnTo>
-                    <a:pt x="2578410" y="532092"/>
-                  </a:lnTo>
-                  <a:lnTo>
-                    <a:pt x="2506788" y="567390"/>
-                  </a:lnTo>
-                  <a:lnTo>
-                    <a:pt x="2435165" y="597664"/>
-                  </a:lnTo>
-                  <a:lnTo>
-                    <a:pt x="2363543" y="623630"/>
-                  </a:lnTo>
-                  <a:lnTo>
-                    <a:pt x="2291920" y="645899"/>
-                  </a:lnTo>
-                  <a:lnTo>
-                    <a:pt x="2220298" y="664999"/>
-                  </a:lnTo>
-                  <a:lnTo>
-                    <a:pt x="2148675" y="681380"/>
-                  </a:lnTo>
-                  <a:lnTo>
-                    <a:pt x="2077053" y="695430"/>
-                  </a:lnTo>
-                  <a:lnTo>
-                    <a:pt x="2005430" y="707480"/>
-                  </a:lnTo>
-                  <a:lnTo>
-                    <a:pt x="1933808" y="717814"/>
-                  </a:lnTo>
-                  <a:lnTo>
-                    <a:pt x="1862185" y="726678"/>
-                  </a:lnTo>
-                  <a:lnTo>
-                    <a:pt x="1790563" y="734280"/>
-                  </a:lnTo>
-                  <a:lnTo>
-                    <a:pt x="1718940" y="740800"/>
-                  </a:lnTo>
-                  <a:lnTo>
-                    <a:pt x="1647318" y="746393"/>
-                  </a:lnTo>
-                  <a:lnTo>
-                    <a:pt x="1575695" y="751189"/>
-                  </a:lnTo>
-                  <a:lnTo>
-                    <a:pt x="1504073" y="755302"/>
-                  </a:lnTo>
-                  <a:lnTo>
-                    <a:pt x="1432450" y="758830"/>
-                  </a:lnTo>
-                  <a:lnTo>
-                    <a:pt x="1360827" y="761856"/>
-                  </a:lnTo>
-                  <a:lnTo>
-                    <a:pt x="1289205" y="764451"/>
-                  </a:lnTo>
-                  <a:lnTo>
-                    <a:pt x="1217582" y="766677"/>
-                  </a:lnTo>
-                  <a:lnTo>
-                    <a:pt x="1145960" y="768586"/>
-                  </a:lnTo>
-                  <a:lnTo>
-                    <a:pt x="1074337" y="770223"/>
-                  </a:lnTo>
-                  <a:lnTo>
-                    <a:pt x="1002715" y="771627"/>
-                  </a:lnTo>
-                  <a:lnTo>
-                    <a:pt x="931092" y="772832"/>
-                  </a:lnTo>
-                  <a:lnTo>
-                    <a:pt x="859470" y="773865"/>
-                  </a:lnTo>
-                  <a:lnTo>
-                    <a:pt x="787847" y="774751"/>
-                  </a:lnTo>
-                  <a:lnTo>
-                    <a:pt x="716225" y="775511"/>
-                  </a:lnTo>
-                  <a:lnTo>
-                    <a:pt x="644602" y="776162"/>
-                  </a:lnTo>
-                  <a:lnTo>
-                    <a:pt x="572980" y="776721"/>
-                  </a:lnTo>
-                  <a:lnTo>
-                    <a:pt x="501357" y="777200"/>
-                  </a:lnTo>
-                  <a:lnTo>
-                    <a:pt x="429735" y="777612"/>
-                  </a:lnTo>
-                  <a:lnTo>
-                    <a:pt x="358112" y="777964"/>
-                  </a:lnTo>
-                  <a:lnTo>
-                    <a:pt x="286490" y="778267"/>
-                  </a:lnTo>
-                  <a:lnTo>
-                    <a:pt x="214867" y="778526"/>
-                  </a:lnTo>
-                  <a:lnTo>
-                    <a:pt x="143245" y="778748"/>
-                  </a:lnTo>
-                  <a:lnTo>
-                    <a:pt x="71622" y="778939"/>
-                  </a:lnTo>
-                  <a:lnTo>
-                    <a:pt x="0" y="779103"/>
+                    <a:pt x="3079768" y="53547"/>
+                  </a:lnTo>
+                  <a:lnTo>
+                    <a:pt x="3008146" y="155645"/>
+                  </a:lnTo>
+                  <a:lnTo>
+                    <a:pt x="2936523" y="243415"/>
+                  </a:lnTo>
+                  <a:lnTo>
+                    <a:pt x="2864901" y="318869"/>
+                  </a:lnTo>
+                  <a:lnTo>
+                    <a:pt x="2793278" y="383734"/>
+                  </a:lnTo>
+                  <a:lnTo>
+                    <a:pt x="2721655" y="439496"/>
+                  </a:lnTo>
+                  <a:lnTo>
+                    <a:pt x="2650033" y="487433"/>
+                  </a:lnTo>
+                  <a:lnTo>
+                    <a:pt x="2578410" y="528643"/>
+                  </a:lnTo>
+                  <a:lnTo>
+                    <a:pt x="2506788" y="564070"/>
+                  </a:lnTo>
+                  <a:lnTo>
+                    <a:pt x="2435165" y="594526"/>
+                  </a:lnTo>
+                  <a:lnTo>
+                    <a:pt x="2363543" y="620708"/>
+                  </a:lnTo>
+                  <a:lnTo>
+                    <a:pt x="2291920" y="643215"/>
+                  </a:lnTo>
+                  <a:lnTo>
+                    <a:pt x="2220298" y="662564"/>
+                  </a:lnTo>
+                  <a:lnTo>
+                    <a:pt x="2148675" y="679198"/>
+                  </a:lnTo>
+                  <a:lnTo>
+                    <a:pt x="2077053" y="693497"/>
+                  </a:lnTo>
+                  <a:lnTo>
+                    <a:pt x="2005430" y="705790"/>
+                  </a:lnTo>
+                  <a:lnTo>
+                    <a:pt x="1933808" y="716358"/>
+                  </a:lnTo>
+                  <a:lnTo>
+                    <a:pt x="1862185" y="725443"/>
+                  </a:lnTo>
+                  <a:lnTo>
+                    <a:pt x="1790563" y="733253"/>
+                  </a:lnTo>
+                  <a:lnTo>
+                    <a:pt x="1718940" y="739967"/>
+                  </a:lnTo>
+                  <a:lnTo>
+                    <a:pt x="1647318" y="745738"/>
+                  </a:lnTo>
+                  <a:lnTo>
+                    <a:pt x="1575695" y="750700"/>
+                  </a:lnTo>
+                  <a:lnTo>
+                    <a:pt x="1504073" y="754966"/>
+                  </a:lnTo>
+                  <a:lnTo>
+                    <a:pt x="1432450" y="758633"/>
+                  </a:lnTo>
+                  <a:lnTo>
+                    <a:pt x="1360827" y="761785"/>
+                  </a:lnTo>
+                  <a:lnTo>
+                    <a:pt x="1289205" y="764495"/>
+                  </a:lnTo>
+                  <a:lnTo>
+                    <a:pt x="1217582" y="766825"/>
+                  </a:lnTo>
+                  <a:lnTo>
+                    <a:pt x="1145960" y="768827"/>
+                  </a:lnTo>
+                  <a:lnTo>
+                    <a:pt x="1074337" y="770549"/>
+                  </a:lnTo>
+                  <a:lnTo>
+                    <a:pt x="1002715" y="772029"/>
+                  </a:lnTo>
+                  <a:lnTo>
+                    <a:pt x="931092" y="773302"/>
+                  </a:lnTo>
+                  <a:lnTo>
+                    <a:pt x="859470" y="774395"/>
+                  </a:lnTo>
+                  <a:lnTo>
+                    <a:pt x="787847" y="775336"/>
+                  </a:lnTo>
+                  <a:lnTo>
+                    <a:pt x="716225" y="776144"/>
+                  </a:lnTo>
+                  <a:lnTo>
+                    <a:pt x="644602" y="776839"/>
+                  </a:lnTo>
+                  <a:lnTo>
+                    <a:pt x="572980" y="777436"/>
+                  </a:lnTo>
+                  <a:lnTo>
+                    <a:pt x="501357" y="777950"/>
+                  </a:lnTo>
+                  <a:lnTo>
+                    <a:pt x="429735" y="778391"/>
+                  </a:lnTo>
+                  <a:lnTo>
+                    <a:pt x="358112" y="778771"/>
+                  </a:lnTo>
+                  <a:lnTo>
+                    <a:pt x="286490" y="779097"/>
+                  </a:lnTo>
+                  <a:lnTo>
+                    <a:pt x="214867" y="779378"/>
+                  </a:lnTo>
+                  <a:lnTo>
+                    <a:pt x="143245" y="779619"/>
+                  </a:lnTo>
+                  <a:lnTo>
+                    <a:pt x="71622" y="779826"/>
+                  </a:lnTo>
+                  <a:lnTo>
+                    <a:pt x="0" y="780004"/>
                   </a:lnTo>
                 </a:path>
               </a:pathLst>
@@ -4166,210 +4166,210 @@
           </p:nvSpPr>
           <p:spPr>
             <a:xfrm>
-              <a:off x="3619826" y="2073503"/>
-              <a:ext cx="4642853" cy="3483509"/>
+              <a:off x="3631060" y="2073503"/>
+              <a:ext cx="4631618" cy="3483537"/>
             </a:xfrm>
             <a:custGeom>
               <a:avLst/>
               <a:pathLst>
-                <a:path w="4642853" h="3483509">
+                <a:path w="4631618" h="3483537">
                   <a:moveTo>
                     <a:pt x="0" y="0"/>
                   </a:moveTo>
                   <a:lnTo>
-                    <a:pt x="59011" y="404621"/>
-                  </a:lnTo>
-                  <a:lnTo>
-                    <a:pt x="130633" y="828161"/>
-                  </a:lnTo>
-                  <a:lnTo>
-                    <a:pt x="202256" y="1193443"/>
-                  </a:lnTo>
-                  <a:lnTo>
-                    <a:pt x="273879" y="1508479"/>
-                  </a:lnTo>
-                  <a:lnTo>
-                    <a:pt x="345501" y="1780181"/>
-                  </a:lnTo>
-                  <a:lnTo>
-                    <a:pt x="417124" y="2014510"/>
-                  </a:lnTo>
-                  <a:lnTo>
-                    <a:pt x="488746" y="2216607"/>
-                  </a:lnTo>
-                  <a:lnTo>
-                    <a:pt x="560369" y="2390905"/>
-                  </a:lnTo>
-                  <a:lnTo>
-                    <a:pt x="631991" y="2541228"/>
-                  </a:lnTo>
-                  <a:lnTo>
-                    <a:pt x="703614" y="2670873"/>
-                  </a:lnTo>
-                  <a:lnTo>
-                    <a:pt x="775236" y="2782686"/>
-                  </a:lnTo>
-                  <a:lnTo>
-                    <a:pt x="846859" y="2879118"/>
-                  </a:lnTo>
-                  <a:lnTo>
-                    <a:pt x="918481" y="2962286"/>
-                  </a:lnTo>
-                  <a:lnTo>
-                    <a:pt x="990104" y="3034014"/>
-                  </a:lnTo>
-                  <a:lnTo>
-                    <a:pt x="1061726" y="3095876"/>
-                  </a:lnTo>
-                  <a:lnTo>
-                    <a:pt x="1133349" y="3149228"/>
-                  </a:lnTo>
-                  <a:lnTo>
-                    <a:pt x="1204971" y="3195242"/>
-                  </a:lnTo>
-                  <a:lnTo>
-                    <a:pt x="1276594" y="3234926"/>
-                  </a:lnTo>
-                  <a:lnTo>
-                    <a:pt x="1348216" y="3269152"/>
-                  </a:lnTo>
-                  <a:lnTo>
-                    <a:pt x="1419839" y="3298670"/>
-                  </a:lnTo>
-                  <a:lnTo>
-                    <a:pt x="1491461" y="3324128"/>
-                  </a:lnTo>
-                  <a:lnTo>
-                    <a:pt x="1563084" y="3346084"/>
-                  </a:lnTo>
-                  <a:lnTo>
-                    <a:pt x="1634706" y="3365019"/>
-                  </a:lnTo>
-                  <a:lnTo>
-                    <a:pt x="1706329" y="3381351"/>
-                  </a:lnTo>
-                  <a:lnTo>
-                    <a:pt x="1777952" y="3395435"/>
-                  </a:lnTo>
-                  <a:lnTo>
-                    <a:pt x="1849574" y="3407583"/>
-                  </a:lnTo>
-                  <a:lnTo>
-                    <a:pt x="1921197" y="3418059"/>
-                  </a:lnTo>
-                  <a:lnTo>
-                    <a:pt x="1992819" y="3427095"/>
-                  </a:lnTo>
-                  <a:lnTo>
-                    <a:pt x="2064442" y="3434887"/>
-                  </a:lnTo>
-                  <a:lnTo>
-                    <a:pt x="2136064" y="3441608"/>
-                  </a:lnTo>
-                  <a:lnTo>
-                    <a:pt x="2207687" y="3447404"/>
-                  </a:lnTo>
-                  <a:lnTo>
-                    <a:pt x="2279309" y="3452403"/>
-                  </a:lnTo>
-                  <a:lnTo>
-                    <a:pt x="2350932" y="3456714"/>
-                  </a:lnTo>
-                  <a:lnTo>
-                    <a:pt x="2422554" y="3460433"/>
-                  </a:lnTo>
-                  <a:lnTo>
-                    <a:pt x="2494177" y="3463640"/>
-                  </a:lnTo>
-                  <a:lnTo>
-                    <a:pt x="2565799" y="3466405"/>
-                  </a:lnTo>
-                  <a:lnTo>
-                    <a:pt x="2637422" y="3468791"/>
-                  </a:lnTo>
-                  <a:lnTo>
-                    <a:pt x="2709044" y="3470848"/>
-                  </a:lnTo>
-                  <a:lnTo>
-                    <a:pt x="2780667" y="3472622"/>
-                  </a:lnTo>
-                  <a:lnTo>
-                    <a:pt x="2852289" y="3474152"/>
-                  </a:lnTo>
-                  <a:lnTo>
-                    <a:pt x="2923912" y="3475472"/>
-                  </a:lnTo>
-                  <a:lnTo>
-                    <a:pt x="2995534" y="3476610"/>
-                  </a:lnTo>
-                  <a:lnTo>
-                    <a:pt x="3067157" y="3477592"/>
-                  </a:lnTo>
-                  <a:lnTo>
-                    <a:pt x="3138780" y="3478438"/>
-                  </a:lnTo>
-                  <a:lnTo>
-                    <a:pt x="3210402" y="3479168"/>
-                  </a:lnTo>
-                  <a:lnTo>
-                    <a:pt x="3282025" y="3479798"/>
-                  </a:lnTo>
-                  <a:lnTo>
-                    <a:pt x="3353647" y="3480341"/>
-                  </a:lnTo>
-                  <a:lnTo>
-                    <a:pt x="3425270" y="3480810"/>
-                  </a:lnTo>
-                  <a:lnTo>
-                    <a:pt x="3496892" y="3481214"/>
-                  </a:lnTo>
-                  <a:lnTo>
-                    <a:pt x="3568515" y="3481562"/>
-                  </a:lnTo>
-                  <a:lnTo>
-                    <a:pt x="3640137" y="3481862"/>
-                  </a:lnTo>
-                  <a:lnTo>
-                    <a:pt x="3711760" y="3482122"/>
-                  </a:lnTo>
-                  <a:lnTo>
-                    <a:pt x="3783382" y="3482345"/>
-                  </a:lnTo>
-                  <a:lnTo>
-                    <a:pt x="3855005" y="3482538"/>
-                  </a:lnTo>
-                  <a:lnTo>
-                    <a:pt x="3926627" y="3482704"/>
-                  </a:lnTo>
-                  <a:lnTo>
-                    <a:pt x="3998250" y="3482847"/>
-                  </a:lnTo>
-                  <a:lnTo>
-                    <a:pt x="4069872" y="3482971"/>
-                  </a:lnTo>
-                  <a:lnTo>
-                    <a:pt x="4141495" y="3483078"/>
-                  </a:lnTo>
-                  <a:lnTo>
-                    <a:pt x="4213117" y="3483170"/>
-                  </a:lnTo>
-                  <a:lnTo>
-                    <a:pt x="4284740" y="3483249"/>
-                  </a:lnTo>
-                  <a:lnTo>
-                    <a:pt x="4356362" y="3483317"/>
-                  </a:lnTo>
-                  <a:lnTo>
-                    <a:pt x="4427985" y="3483376"/>
-                  </a:lnTo>
-                  <a:lnTo>
-                    <a:pt x="4499608" y="3483427"/>
-                  </a:lnTo>
-                  <a:lnTo>
-                    <a:pt x="4571230" y="3483471"/>
-                  </a:lnTo>
-                  <a:lnTo>
-                    <a:pt x="4642853" y="3483509"/>
+                    <a:pt x="47776" y="340019"/>
+                  </a:lnTo>
+                  <a:lnTo>
+                    <a:pt x="119399" y="778627"/>
+                  </a:lnTo>
+                  <a:lnTo>
+                    <a:pt x="191021" y="1156042"/>
+                  </a:lnTo>
+                  <a:lnTo>
+                    <a:pt x="262644" y="1480800"/>
+                  </a:lnTo>
+                  <a:lnTo>
+                    <a:pt x="334266" y="1760249"/>
+                  </a:lnTo>
+                  <a:lnTo>
+                    <a:pt x="405889" y="2000709"/>
+                  </a:lnTo>
+                  <a:lnTo>
+                    <a:pt x="477511" y="2207620"/>
+                  </a:lnTo>
+                  <a:lnTo>
+                    <a:pt x="549134" y="2385664"/>
+                  </a:lnTo>
+                  <a:lnTo>
+                    <a:pt x="620757" y="2538867"/>
+                  </a:lnTo>
+                  <a:lnTo>
+                    <a:pt x="692379" y="2670695"/>
+                  </a:lnTo>
+                  <a:lnTo>
+                    <a:pt x="764002" y="2784131"/>
+                  </a:lnTo>
+                  <a:lnTo>
+                    <a:pt x="835624" y="2881740"/>
+                  </a:lnTo>
+                  <a:lnTo>
+                    <a:pt x="907247" y="2965731"/>
+                  </a:lnTo>
+                  <a:lnTo>
+                    <a:pt x="978869" y="3038004"/>
+                  </a:lnTo>
+                  <a:lnTo>
+                    <a:pt x="1050492" y="3100194"/>
+                  </a:lnTo>
+                  <a:lnTo>
+                    <a:pt x="1122114" y="3153706"/>
+                  </a:lnTo>
+                  <a:lnTo>
+                    <a:pt x="1193737" y="3199753"/>
+                  </a:lnTo>
+                  <a:lnTo>
+                    <a:pt x="1265359" y="3239375"/>
+                  </a:lnTo>
+                  <a:lnTo>
+                    <a:pt x="1336982" y="3273470"/>
+                  </a:lnTo>
+                  <a:lnTo>
+                    <a:pt x="1408604" y="3302807"/>
+                  </a:lnTo>
+                  <a:lnTo>
+                    <a:pt x="1480227" y="3328052"/>
+                  </a:lnTo>
+                  <a:lnTo>
+                    <a:pt x="1551849" y="3349774"/>
+                  </a:lnTo>
+                  <a:lnTo>
+                    <a:pt x="1623472" y="3368466"/>
+                  </a:lnTo>
+                  <a:lnTo>
+                    <a:pt x="1695094" y="3384549"/>
+                  </a:lnTo>
+                  <a:lnTo>
+                    <a:pt x="1766717" y="3398389"/>
+                  </a:lnTo>
+                  <a:lnTo>
+                    <a:pt x="1838339" y="3410298"/>
+                  </a:lnTo>
+                  <a:lnTo>
+                    <a:pt x="1909962" y="3420546"/>
+                  </a:lnTo>
+                  <a:lnTo>
+                    <a:pt x="1981585" y="3429363"/>
+                  </a:lnTo>
+                  <a:lnTo>
+                    <a:pt x="2053207" y="3436951"/>
+                  </a:lnTo>
+                  <a:lnTo>
+                    <a:pt x="2124830" y="3443480"/>
+                  </a:lnTo>
+                  <a:lnTo>
+                    <a:pt x="2196452" y="3449098"/>
+                  </a:lnTo>
+                  <a:lnTo>
+                    <a:pt x="2268075" y="3453932"/>
+                  </a:lnTo>
+                  <a:lnTo>
+                    <a:pt x="2339697" y="3458091"/>
+                  </a:lnTo>
+                  <a:lnTo>
+                    <a:pt x="2411320" y="3461671"/>
+                  </a:lnTo>
+                  <a:lnTo>
+                    <a:pt x="2482942" y="3464751"/>
+                  </a:lnTo>
+                  <a:lnTo>
+                    <a:pt x="2554565" y="3467401"/>
+                  </a:lnTo>
+                  <a:lnTo>
+                    <a:pt x="2626187" y="3469681"/>
+                  </a:lnTo>
+                  <a:lnTo>
+                    <a:pt x="2697810" y="3471644"/>
+                  </a:lnTo>
+                  <a:lnTo>
+                    <a:pt x="2769432" y="3473332"/>
+                  </a:lnTo>
+                  <a:lnTo>
+                    <a:pt x="2841055" y="3474785"/>
+                  </a:lnTo>
+                  <a:lnTo>
+                    <a:pt x="2912677" y="3476036"/>
+                  </a:lnTo>
+                  <a:lnTo>
+                    <a:pt x="2984300" y="3477111"/>
+                  </a:lnTo>
+                  <a:lnTo>
+                    <a:pt x="3055922" y="3478037"/>
+                  </a:lnTo>
+                  <a:lnTo>
+                    <a:pt x="3127545" y="3478834"/>
+                  </a:lnTo>
+                  <a:lnTo>
+                    <a:pt x="3199167" y="3479519"/>
+                  </a:lnTo>
+                  <a:lnTo>
+                    <a:pt x="3270790" y="3480109"/>
+                  </a:lnTo>
+                  <a:lnTo>
+                    <a:pt x="3342413" y="3480616"/>
+                  </a:lnTo>
+                  <a:lnTo>
+                    <a:pt x="3414035" y="3481053"/>
+                  </a:lnTo>
+                  <a:lnTo>
+                    <a:pt x="3485658" y="3481429"/>
+                  </a:lnTo>
+                  <a:lnTo>
+                    <a:pt x="3557280" y="3481752"/>
+                  </a:lnTo>
+                  <a:lnTo>
+                    <a:pt x="3628903" y="3482030"/>
+                  </a:lnTo>
+                  <a:lnTo>
+                    <a:pt x="3700525" y="3482270"/>
+                  </a:lnTo>
+                  <a:lnTo>
+                    <a:pt x="3772148" y="3482476"/>
+                  </a:lnTo>
+                  <a:lnTo>
+                    <a:pt x="3843770" y="3482653"/>
+                  </a:lnTo>
+                  <a:lnTo>
+                    <a:pt x="3915393" y="3482806"/>
+                  </a:lnTo>
+                  <a:lnTo>
+                    <a:pt x="3987015" y="3482937"/>
+                  </a:lnTo>
+                  <a:lnTo>
+                    <a:pt x="4058638" y="3483050"/>
+                  </a:lnTo>
+                  <a:lnTo>
+                    <a:pt x="4130260" y="3483147"/>
+                  </a:lnTo>
+                  <a:lnTo>
+                    <a:pt x="4201883" y="3483231"/>
+                  </a:lnTo>
+                  <a:lnTo>
+                    <a:pt x="4273505" y="3483303"/>
+                  </a:lnTo>
+                  <a:lnTo>
+                    <a:pt x="4345128" y="3483365"/>
+                  </a:lnTo>
+                  <a:lnTo>
+                    <a:pt x="4416750" y="3483418"/>
+                  </a:lnTo>
+                  <a:lnTo>
+                    <a:pt x="4488373" y="3483464"/>
+                  </a:lnTo>
+                  <a:lnTo>
+                    <a:pt x="4559995" y="3483503"/>
+                  </a:lnTo>
+                  <a:lnTo>
+                    <a:pt x="4631618" y="3483537"/>
                   </a:lnTo>
                 </a:path>
               </a:pathLst>
@@ -4441,7 +4441,7 @@
           </p:nvSpPr>
           <p:spPr>
             <a:xfrm>
-              <a:off x="4313661" y="2073503"/>
+              <a:off x="4313914" y="2073503"/>
               <a:ext cx="0" cy="3649639"/>
             </a:xfrm>
             <a:custGeom>
@@ -4714,7 +4714,7 @@
           </p:nvSpPr>
           <p:spPr>
             <a:xfrm>
-              <a:off x="1343342" y="5785772"/>
+              <a:off x="1344940" y="5785772"/>
               <a:ext cx="161574" cy="80101"/>
             </a:xfrm>
             <a:prstGeom prst="rect">
@@ -4760,7 +4760,7 @@
           </p:nvSpPr>
           <p:spPr>
             <a:xfrm>
-              <a:off x="2280620" y="5785772"/>
+              <a:off x="2281218" y="5785772"/>
               <a:ext cx="161574" cy="80101"/>
             </a:xfrm>
             <a:prstGeom prst="rect">
@@ -4806,7 +4806,7 @@
           </p:nvSpPr>
           <p:spPr>
             <a:xfrm>
-              <a:off x="3217897" y="5785772"/>
+              <a:off x="3217496" y="5785772"/>
               <a:ext cx="161574" cy="80101"/>
             </a:xfrm>
             <a:prstGeom prst="rect">
@@ -4852,7 +4852,7 @@
           </p:nvSpPr>
           <p:spPr>
             <a:xfrm>
-              <a:off x="4204872" y="5785772"/>
+              <a:off x="4203472" y="5785772"/>
               <a:ext cx="62179" cy="80101"/>
             </a:xfrm>
             <a:prstGeom prst="rect">
@@ -4898,7 +4898,7 @@
           </p:nvSpPr>
           <p:spPr>
             <a:xfrm>
-              <a:off x="5111060" y="5785772"/>
+              <a:off x="5108660" y="5785772"/>
               <a:ext cx="124358" cy="80101"/>
             </a:xfrm>
             <a:prstGeom prst="rect">
@@ -4944,7 +4944,7 @@
           </p:nvSpPr>
           <p:spPr>
             <a:xfrm>
-              <a:off x="6048338" y="5785772"/>
+              <a:off x="6044938" y="5785772"/>
               <a:ext cx="124358" cy="80101"/>
             </a:xfrm>
             <a:prstGeom prst="rect">
@@ -4990,7 +4990,7 @@
           </p:nvSpPr>
           <p:spPr>
             <a:xfrm>
-              <a:off x="6985615" y="5785772"/>
+              <a:off x="6981216" y="5785772"/>
               <a:ext cx="124358" cy="80101"/>
             </a:xfrm>
             <a:prstGeom prst="rect">
@@ -5036,7 +5036,7 @@
           </p:nvSpPr>
           <p:spPr>
             <a:xfrm>
-              <a:off x="7922893" y="5785772"/>
+              <a:off x="7917494" y="5785772"/>
               <a:ext cx="124358" cy="80101"/>
             </a:xfrm>
             <a:prstGeom prst="rect">
@@ -5207,7 +5207,7 @@
                   <a:latin typeface="Helvetica"/>
                   <a:cs typeface="Helvetica"/>
                 </a:rPr>
-                <a:t>subHR per 10 % decline: 6.93 (0.13-358.65), p_Bonf = 1.000 (n = 6)  |  per IQR decline (Δ = 25.8 %): 148.87 (0.01-3981524.61)  |  IQR: [-10.7, 15.1] %</a:t>
+                <a:t>subHR per 10 % decline: 7.13 (0.14-366.96), p_Bonf = 1.000 (n = 6)  |  per IQR decline (Δ = 25.8 %): 159.02 (0.01-4151147.58)  |  IQR: [-10.6, 15.2] %</a:t>
               </a:r>
             </a:p>
           </p:txBody>
